--- a/assets/pptx/catalog-13.pptx
+++ b/assets/pptx/catalog-13.pptx
@@ -3316,7 +3316,7 @@
                 <a:ea typeface="Ebrima"/>
                 <a:cs typeface="Ebrima"/>
               </a:rPr>
-              <a:t>እየሱስ ጌታዬ(2) (2)</a:t>
+              <a:t>እየሱስ ጌታዬ2 2</a:t>
             </a:r>
           </a:p>
           <a:p>
@@ -3442,7 +3442,7 @@
                 <a:ea typeface="Ebrima"/>
                 <a:cs typeface="Ebrima"/>
               </a:rPr>
-              <a:t>ሆኜ በ ትካዜ (2)</a:t>
+              <a:t>ሆኜ በ ትካዜ 2</a:t>
             </a:r>
           </a:p>
           <a:p>
@@ -3478,7 +3478,7 @@
                 <a:ea typeface="Ebrima"/>
                 <a:cs typeface="Ebrima"/>
               </a:rPr>
-              <a:t>ሃዘን ተከልክሎ (2)</a:t>
+              <a:t>ሃዘን ተከልክሎ 2</a:t>
             </a:r>
           </a:p>
           <a:p>
@@ -3532,7 +3532,7 @@
                 <a:ea typeface="Ebrima"/>
                 <a:cs typeface="Ebrima"/>
               </a:rPr>
-              <a:t>ባምላኬ ተመተው (2)</a:t>
+              <a:t>ባምላኬ ተመተው 2</a:t>
             </a:r>
           </a:p>
         </p:txBody>
@@ -3671,7 +3671,7 @@
                 <a:ea typeface="Ebrima"/>
                 <a:cs typeface="Ebrima"/>
               </a:rPr>
-              <a:t>እየሱስ ጌታዬ(2) (2)</a:t>
+              <a:t>እየሱስ ጌታዬ2 2</a:t>
             </a:r>
           </a:p>
           <a:p>
@@ -3918,7 +3918,7 @@
                 <a:ea typeface="Ebrima"/>
                 <a:cs typeface="Ebrima"/>
               </a:rPr>
-              <a:t>በ ጦርነቴ ላይ ድልን የሚያመጣ (2)</a:t>
+              <a:t>በ ጦርነቴ ላይ ድልን የሚያመጣ 2</a:t>
             </a:r>
           </a:p>
           <a:p>
@@ -4075,7 +4075,7 @@
                 <a:ea typeface="Ebrima"/>
                 <a:cs typeface="Ebrima"/>
               </a:rPr>
-              <a:t>ኢየሱሴ ደራሽ ለ ነፍሴ (4)</a:t>
+              <a:t>ኢየሱሴ ደራሽ ለ ነፍሴ 4</a:t>
             </a:r>
           </a:p>
         </p:txBody>
